--- a/Grp6_PPT.pptx
+++ b/Grp6_PPT.pptx
@@ -1583,7 +1583,7 @@
           <a:p>
             <a:fld id="{5BCAD085-E8A6-8845-BD4E-CB4CCA059FC4}" type="datetimeFigureOut">
               <a:rPr lang="en-US" smtClean="0"/>
-              <a:t>2/28/26</a:t>
+              <a:t>3/1/26</a:t>
             </a:fld>
             <a:endParaRPr lang="en-US"/>
           </a:p>
@@ -1751,7 +1751,7 @@
           <a:p>
             <a:fld id="{5BCAD085-E8A6-8845-BD4E-CB4CCA059FC4}" type="datetimeFigureOut">
               <a:rPr lang="en-US" smtClean="0"/>
-              <a:t>2/28/26</a:t>
+              <a:t>3/1/26</a:t>
             </a:fld>
             <a:endParaRPr lang="en-US"/>
           </a:p>
@@ -1929,7 +1929,7 @@
           <a:p>
             <a:fld id="{5BCAD085-E8A6-8845-BD4E-CB4CCA059FC4}" type="datetimeFigureOut">
               <a:rPr lang="en-US" smtClean="0"/>
-              <a:t>2/28/26</a:t>
+              <a:t>3/1/26</a:t>
             </a:fld>
             <a:endParaRPr lang="en-US"/>
           </a:p>
@@ -2132,7 +2132,7 @@
           <a:p>
             <a:fld id="{5BCAD085-E8A6-8845-BD4E-CB4CCA059FC4}" type="datetimeFigureOut">
               <a:rPr lang="en-US" smtClean="0"/>
-              <a:t>2/28/26</a:t>
+              <a:t>3/1/26</a:t>
             </a:fld>
             <a:endParaRPr lang="en-US"/>
           </a:p>
@@ -2377,7 +2377,7 @@
           <a:p>
             <a:fld id="{5BCAD085-E8A6-8845-BD4E-CB4CCA059FC4}" type="datetimeFigureOut">
               <a:rPr lang="en-US" smtClean="0"/>
-              <a:t>2/28/26</a:t>
+              <a:t>3/1/26</a:t>
             </a:fld>
             <a:endParaRPr lang="en-US"/>
           </a:p>
@@ -2662,7 +2662,7 @@
           <a:p>
             <a:fld id="{5BCAD085-E8A6-8845-BD4E-CB4CCA059FC4}" type="datetimeFigureOut">
               <a:rPr lang="en-US" smtClean="0"/>
-              <a:t>2/28/26</a:t>
+              <a:t>3/1/26</a:t>
             </a:fld>
             <a:endParaRPr lang="en-US"/>
           </a:p>
@@ -3081,7 +3081,7 @@
           <a:p>
             <a:fld id="{5BCAD085-E8A6-8845-BD4E-CB4CCA059FC4}" type="datetimeFigureOut">
               <a:rPr lang="en-US" smtClean="0"/>
-              <a:t>2/28/26</a:t>
+              <a:t>3/1/26</a:t>
             </a:fld>
             <a:endParaRPr lang="en-US"/>
           </a:p>
@@ -3198,7 +3198,7 @@
           <a:p>
             <a:fld id="{5BCAD085-E8A6-8845-BD4E-CB4CCA059FC4}" type="datetimeFigureOut">
               <a:rPr lang="en-US" smtClean="0"/>
-              <a:t>2/28/26</a:t>
+              <a:t>3/1/26</a:t>
             </a:fld>
             <a:endParaRPr lang="en-US"/>
           </a:p>
@@ -3293,7 +3293,7 @@
           <a:p>
             <a:fld id="{5BCAD085-E8A6-8845-BD4E-CB4CCA059FC4}" type="datetimeFigureOut">
               <a:rPr lang="en-US" smtClean="0"/>
-              <a:t>2/28/26</a:t>
+              <a:t>3/1/26</a:t>
             </a:fld>
             <a:endParaRPr lang="en-US"/>
           </a:p>
@@ -3568,7 +3568,7 @@
           <a:p>
             <a:fld id="{5BCAD085-E8A6-8845-BD4E-CB4CCA059FC4}" type="datetimeFigureOut">
               <a:rPr lang="en-US" smtClean="0"/>
-              <a:t>2/28/26</a:t>
+              <a:t>3/1/26</a:t>
             </a:fld>
             <a:endParaRPr lang="en-US"/>
           </a:p>
@@ -3820,7 +3820,7 @@
           <a:p>
             <a:fld id="{5BCAD085-E8A6-8845-BD4E-CB4CCA059FC4}" type="datetimeFigureOut">
               <a:rPr lang="en-US" smtClean="0"/>
-              <a:t>2/28/26</a:t>
+              <a:t>3/1/26</a:t>
             </a:fld>
             <a:endParaRPr lang="en-US"/>
           </a:p>
@@ -4031,7 +4031,7 @@
           <a:p>
             <a:fld id="{5BCAD085-E8A6-8845-BD4E-CB4CCA059FC4}" type="datetimeFigureOut">
               <a:rPr lang="en-US" smtClean="0"/>
-              <a:t>2/28/26</a:t>
+              <a:t>3/1/26</a:t>
             </a:fld>
             <a:endParaRPr lang="en-US"/>
           </a:p>
@@ -5364,49 +5364,32 @@
       </p:sp>
       <p:pic>
         <p:nvPicPr>
-          <p:cNvPr id="3074" name="Picture 2">
+          <p:cNvPr id="4" name="Picture 3">
             <a:extLst>
               <a:ext uri="{FF2B5EF4-FFF2-40B4-BE49-F238E27FC236}">
-                <a16:creationId xmlns:a16="http://schemas.microsoft.com/office/drawing/2014/main" id="{C9122CD2-CF0D-95D8-2651-1F9E1A7B2C72}"/>
+                <a16:creationId xmlns:a16="http://schemas.microsoft.com/office/drawing/2014/main" id="{5B063E89-1C22-4085-6414-8DEE1FDBC554}"/>
               </a:ext>
             </a:extLst>
           </p:cNvPr>
           <p:cNvPicPr>
-            <a:picLocks noChangeAspect="1" noChangeArrowheads="1"/>
+            <a:picLocks noChangeAspect="1"/>
           </p:cNvPicPr>
           <p:nvPr/>
         </p:nvPicPr>
         <p:blipFill>
-          <a:blip r:embed="rId3">
-            <a:extLst>
-              <a:ext uri="{28A0092B-C50C-407E-A947-70E740481C1C}">
-                <a14:useLocalDpi xmlns:a14="http://schemas.microsoft.com/office/drawing/2010/main" val="0"/>
-              </a:ext>
-            </a:extLst>
-          </a:blip>
-          <a:srcRect/>
+          <a:blip r:embed="rId3"/>
           <a:stretch>
             <a:fillRect/>
           </a:stretch>
         </p:blipFill>
-        <p:spPr bwMode="auto">
+        <p:spPr>
           <a:xfrm>
-            <a:off x="1277589" y="1099443"/>
-            <a:ext cx="9633647" cy="5587515"/>
+            <a:off x="1429278" y="1170432"/>
+            <a:ext cx="9483196" cy="5511031"/>
           </a:xfrm>
           <a:prstGeom prst="rect">
             <a:avLst/>
           </a:prstGeom>
-          <a:noFill/>
-          <a:extLst>
-            <a:ext uri="{909E8E84-426E-40DD-AFC4-6F175D3DCCD1}">
-              <a14:hiddenFill xmlns:a14="http://schemas.microsoft.com/office/drawing/2010/main">
-                <a:solidFill>
-                  <a:srgbClr val="FFFFFF"/>
-                </a:solidFill>
-              </a14:hiddenFill>
-            </a:ext>
-          </a:extLst>
         </p:spPr>
       </p:pic>
     </p:spTree>
